--- a/04b-rooms-and-rents/slides-2-rent.pptx
+++ b/04b-rooms-and-rents/slides-2-rent.pptx
@@ -6778,7 +6778,7 @@
           <a:p>
             <a:fld id="{C98FE7E5-AEA8-43C3-B38D-978F52DB723C}" type="datetimeFigureOut">
               <a:rPr lang="he-IL" smtClean="0"/>
-              <a:t>ו'/אייר/תשפ"ה</a:t>
+              <a:t>כ"ה/חשון/תשפ"ו</a:t>
             </a:fld>
             <a:endParaRPr lang="he-IL"/>
           </a:p>
@@ -6977,7 +6977,7 @@
           <a:p>
             <a:fld id="{C98FE7E5-AEA8-43C3-B38D-978F52DB723C}" type="datetimeFigureOut">
               <a:rPr lang="he-IL" smtClean="0"/>
-              <a:t>ו'/אייר/תשפ"ה</a:t>
+              <a:t>כ"ה/חשון/תשפ"ו</a:t>
             </a:fld>
             <a:endParaRPr lang="he-IL"/>
           </a:p>
@@ -7252,7 +7252,7 @@
           <a:p>
             <a:fld id="{C98FE7E5-AEA8-43C3-B38D-978F52DB723C}" type="datetimeFigureOut">
               <a:rPr lang="he-IL" smtClean="0"/>
-              <a:t>ו'/אייר/תשפ"ה</a:t>
+              <a:t>כ"ה/חשון/תשפ"ו</a:t>
             </a:fld>
             <a:endParaRPr lang="he-IL"/>
           </a:p>
@@ -7519,7 +7519,7 @@
           <a:p>
             <a:fld id="{C98FE7E5-AEA8-43C3-B38D-978F52DB723C}" type="datetimeFigureOut">
               <a:rPr lang="he-IL" smtClean="0"/>
-              <a:t>ו'/אייר/תשפ"ה</a:t>
+              <a:t>כ"ה/חשון/תשפ"ו</a:t>
             </a:fld>
             <a:endParaRPr lang="he-IL"/>
           </a:p>
@@ -7933,7 +7933,7 @@
           <a:p>
             <a:fld id="{C98FE7E5-AEA8-43C3-B38D-978F52DB723C}" type="datetimeFigureOut">
               <a:rPr lang="he-IL" smtClean="0"/>
-              <a:t>ו'/אייר/תשפ"ה</a:t>
+              <a:t>כ"ה/חשון/תשפ"ו</a:t>
             </a:fld>
             <a:endParaRPr lang="he-IL"/>
           </a:p>
@@ -8074,7 +8074,7 @@
           <a:p>
             <a:fld id="{C98FE7E5-AEA8-43C3-B38D-978F52DB723C}" type="datetimeFigureOut">
               <a:rPr lang="he-IL" smtClean="0"/>
-              <a:t>ו'/אייר/תשפ"ה</a:t>
+              <a:t>כ"ה/חשון/תשפ"ו</a:t>
             </a:fld>
             <a:endParaRPr lang="he-IL"/>
           </a:p>
@@ -8186,7 +8186,7 @@
           <a:p>
             <a:fld id="{C98FE7E5-AEA8-43C3-B38D-978F52DB723C}" type="datetimeFigureOut">
               <a:rPr lang="he-IL" smtClean="0"/>
-              <a:t>ו'/אייר/תשפ"ה</a:t>
+              <a:t>כ"ה/חשון/תשפ"ו</a:t>
             </a:fld>
             <a:endParaRPr lang="he-IL"/>
           </a:p>
@@ -8769,7 +8769,7 @@
           <a:p>
             <a:fld id="{C98FE7E5-AEA8-43C3-B38D-978F52DB723C}" type="datetimeFigureOut">
               <a:rPr lang="he-IL" smtClean="0"/>
-              <a:t>ו'/אייר/תשפ"ה</a:t>
+              <a:t>כ"ה/חשון/תשפ"ו</a:t>
             </a:fld>
             <a:endParaRPr lang="he-IL"/>
           </a:p>
@@ -9057,7 +9057,7 @@
           <a:p>
             <a:fld id="{C98FE7E5-AEA8-43C3-B38D-978F52DB723C}" type="datetimeFigureOut">
               <a:rPr lang="he-IL" smtClean="0"/>
-              <a:t>ו'/אייר/תשפ"ה</a:t>
+              <a:t>כ"ה/חשון/תשפ"ו</a:t>
             </a:fld>
             <a:endParaRPr lang="he-IL"/>
           </a:p>
@@ -9256,7 +9256,7 @@
           <a:p>
             <a:fld id="{C98FE7E5-AEA8-43C3-B38D-978F52DB723C}" type="datetimeFigureOut">
               <a:rPr lang="he-IL" smtClean="0"/>
-              <a:t>ו'/אייר/תשפ"ה</a:t>
+              <a:t>כ"ה/חשון/תשפ"ו</a:t>
             </a:fld>
             <a:endParaRPr lang="he-IL"/>
           </a:p>
@@ -9465,7 +9465,7 @@
           <a:p>
             <a:fld id="{C98FE7E5-AEA8-43C3-B38D-978F52DB723C}" type="datetimeFigureOut">
               <a:rPr lang="he-IL" smtClean="0"/>
-              <a:t>ו'/אייר/תשפ"ה</a:t>
+              <a:t>כ"ה/חשון/תשפ"ו</a:t>
             </a:fld>
             <a:endParaRPr lang="he-IL"/>
           </a:p>
@@ -12253,7 +12253,7 @@
           <a:p>
             <a:fld id="{C98FE7E5-AEA8-43C3-B38D-978F52DB723C}" type="datetimeFigureOut">
               <a:rPr lang="he-IL" smtClean="0"/>
-              <a:t>ו'/אייר/תשפ"ה</a:t>
+              <a:t>כ"ה/חשון/תשפ"ו</a:t>
             </a:fld>
             <a:endParaRPr lang="he-IL"/>
           </a:p>
@@ -16620,21 +16620,7 @@
                 <a:effectLst/>
                 <a:latin typeface="David CLM" panose="02000603000000000000" pitchFamily="2" charset="-79"/>
               </a:rPr>
-              <a:t>. לפי כלל שובך היונים</a:t>
-            </a:r>
-            <a:r>
-              <a:rPr lang="he-IL">
-                <a:effectLst/>
-                <a:latin typeface="Courier New" panose="02070309020205020404" pitchFamily="49" charset="0"/>
-              </a:rPr>
-              <a:t>, </a:t>
-            </a:r>
-            <a:r>
-              <a:rPr lang="he-IL">
-                <a:effectLst/>
-                <a:latin typeface="David CLM" panose="02000603000000000000" pitchFamily="2" charset="-79"/>
-              </a:rPr>
-              <a:t>יש קשת שמשקלה לפחות </a:t>
+              <a:t>. המקסימום גדול לפחות כמו הממוצע, ולכן יש קשת שמשקלה לפחות </a:t>
             </a:r>
             <a:r>
               <a:rPr lang="en-US">
@@ -30640,7 +30626,7 @@
 </file>
 
 <file path=ppt/slides/slide7.xml><?xml version="1.0" encoding="utf-8"?>
-<p:sld xmlns:a="http://schemas.openxmlformats.org/drawingml/2006/main" xmlns:r="http://schemas.openxmlformats.org/officeDocument/2006/relationships" xmlns:p="http://schemas.openxmlformats.org/presentationml/2006/main">
+<p:sld xmlns:a="http://schemas.openxmlformats.org/drawingml/2006/main" xmlns:r="http://schemas.openxmlformats.org/officeDocument/2006/relationships" xmlns:p="http://schemas.openxmlformats.org/presentationml/2006/main" show="0">
   <p:cSld name="page9">
     <p:spTree>
       <p:nvGrpSpPr>
@@ -31429,7 +31415,7 @@
 </file>
 
 <file path=ppt/slides/slide8.xml><?xml version="1.0" encoding="utf-8"?>
-<p:sld xmlns:a="http://schemas.openxmlformats.org/drawingml/2006/main" xmlns:r="http://schemas.openxmlformats.org/officeDocument/2006/relationships" xmlns:p="http://schemas.openxmlformats.org/presentationml/2006/main">
+<p:sld xmlns:a="http://schemas.openxmlformats.org/drawingml/2006/main" xmlns:r="http://schemas.openxmlformats.org/officeDocument/2006/relationships" xmlns:p="http://schemas.openxmlformats.org/presentationml/2006/main" show="0">
   <p:cSld name="page10">
     <p:spTree>
       <p:nvGrpSpPr>
@@ -32620,7 +32606,7 @@
                 <a:latin typeface="Times New Roman" pitchFamily="18"/>
                 <a:cs typeface="Liberation Sans" pitchFamily="34"/>
               </a:rPr>
-              <a:t>לכן קיים סימפלקסון מגוון.</a:t>
+              <a:t>לכן, לפי הלמה של ספרנר, קיים סימפלקסון מגוון.</a:t>
             </a:r>
           </a:p>
           <a:p>
